--- a/AIFinanceCrashcourse/slides/Module-06-RegTech-and-Basel-Compliance.pptx
+++ b/AIFinanceCrashcourse/slides/Module-06-RegTech-and-Basel-Compliance.pptx
@@ -3270,7 +3270,7 @@
                   <a:srgbClr val="C9A227"/>
                 </a:solidFill>
               </a:rPr>
-              <a:t>ISBMS · PGDM 2025–27 · SEMESTER III · SESSION 6 OF 10</a:t>
+              <a:t>AI IN FINANCE · THE COMPLETE CRASH COURSE · MODULE 6 OF 10</a:t>
             </a:r>
           </a:p>
         </p:txBody>
@@ -3414,7 +3414,7 @@
                   <a:srgbClr val="8FA1C4"/>
                 </a:solidFill>
               </a:rPr>
-              <a:t>Faculty · Agentic AI &amp; Advanced Analytics in Finance (PGDM-SEM3-SPEC-AIFINANCE)</a:t>
+              <a:t>AI in Finance: The Complete Crash Course</a:t>
             </a:r>
           </a:p>
           <a:p>
@@ -3429,7 +3429,7 @@
                   <a:srgbClr val="C9A227"/>
                 </a:solidFill>
               </a:rPr>
-              <a:t>tejasgjadhav.github.io/AIFINANCE</a:t>
+              <a:t>tejasgjadhav.github.io/AIFinanceCrashcourse</a:t>
             </a:r>
           </a:p>
         </p:txBody>
@@ -3722,7 +3722,7 @@
                   <a:srgbClr val="8FA1C4"/>
                 </a:solidFill>
               </a:rPr>
-              <a:t>ISBMS · PGDM 2025–27 · AGENTIC AI &amp; ADVANCED ANALYTICS IN FINANCE</a:t>
+              <a:t>AI IN FINANCE · THE COMPLETE CRASH COURSE</a:t>
             </a:r>
           </a:p>
         </p:txBody>
@@ -4202,7 +4202,7 @@
                 </a:solidFill>
                 <a:latin typeface="Consolas"/>
               </a:rPr>
-              <a:t>  2025-12-31  $362.4 billion   10-K  filed 2026-02-13   [deterministic]</a:t>
+              <a:t>2025-12-31  $362.4 billion   10-K  filed 2026-02-13   [deterministic]</a:t>
             </a:r>
           </a:p>
           <a:p>
@@ -4214,7 +4214,7 @@
                 </a:solidFill>
                 <a:latin typeface="Consolas"/>
               </a:rPr>
-              <a:t>  2026-03-31  $364.0 billion   10-Q  filed 2026-05-01   [deterministic]</a:t>
+              <a:t>2026-03-31  $364.0 billion   10-Q  filed 2026-05-01   [deterministic]</a:t>
             </a:r>
           </a:p>
           <a:p>
@@ -4226,7 +4226,7 @@
                 </a:solidFill>
                 <a:latin typeface="Consolas"/>
               </a:rPr>
-              <a:t>  2026-06-30  $374.6 billion   10-Q  filed 2026-08-06   [deterministic]</a:t>
+              <a:t>2026-06-30  $374.6 billion   10-Q  filed 2026-08-06   [deterministic]</a:t>
             </a:r>
           </a:p>
         </p:txBody>
@@ -4448,7 +4448,7 @@
                   <a:srgbClr val="C9A227"/>
                 </a:solidFill>
               </a:rPr>
-              <a:t>Before any code, find the document:  </a:t>
+              <a:t>Before any code, find the document:</a:t>
             </a:r>
             <a:r>
               <a:rPr sz="1200" b="0">
@@ -4490,7 +4490,7 @@
                   <a:srgbClr val="5D6B7E"/>
                 </a:solidFill>
               </a:rPr>
-              <a:t>ISBMS · PGDM 2025–27 · AGENTIC AI &amp; ADVANCED ANALYTICS IN FINANCE</a:t>
+              <a:t>AI IN FINANCE · THE COMPLETE CRASH COURSE</a:t>
             </a:r>
           </a:p>
         </p:txBody>
@@ -4970,7 +4970,7 @@
                 </a:solidFill>
                 <a:latin typeface="Consolas"/>
               </a:rPr>
-              <a:t>  CET1 capital                    302,619</a:t>
+              <a:t>CET1 capital                    302,619</a:t>
             </a:r>
           </a:p>
           <a:p>
@@ -4982,7 +4982,7 @@
                 </a:solidFill>
                 <a:latin typeface="Consolas"/>
               </a:rPr>
-              <a:t>  Tier 1 capital                  322,720</a:t>
+              <a:t>Tier 1 capital                  322,720</a:t>
             </a:r>
           </a:p>
           <a:p>
@@ -4994,7 +4994,7 @@
                 </a:solidFill>
                 <a:latin typeface="Consolas"/>
               </a:rPr>
-              <a:t>  Total capital                   362,723</a:t>
+              <a:t>Total capital                   362,723</a:t>
             </a:r>
           </a:p>
           <a:p>
@@ -5006,7 +5006,7 @@
                 </a:solidFill>
                 <a:latin typeface="Consolas"/>
               </a:rPr>
-              <a:t>  Risk-weighted assets          2,132,428</a:t>
+              <a:t>Risk-weighted assets          2,132,428</a:t>
             </a:r>
           </a:p>
           <a:p>
@@ -5018,7 +5018,7 @@
                 </a:solidFill>
                 <a:latin typeface="Consolas"/>
               </a:rPr>
-              <a:t>  Total leverage exposure       5,844,422</a:t>
+              <a:t>Total leverage exposure       5,844,422</a:t>
             </a:r>
           </a:p>
           <a:p>
@@ -5030,7 +5030,7 @@
                 </a:solidFill>
                 <a:latin typeface="Consolas"/>
               </a:rPr>
-              <a:t> </a:t>
+              <a:t/>
             </a:r>
           </a:p>
           <a:p>
@@ -5054,7 +5054,7 @@
                 </a:solidFill>
                 <a:latin typeface="Consolas"/>
               </a:rPr>
-              <a:t>  CET1 capital ratio             computed  14.19%   reported  14.2%   PASS   headroom over 11.5%: 2.7 points</a:t>
+              <a:t>CET1 capital ratio             computed  14.19%   reported  14.2%   PASS   headroom over 11.5%: 2.7 points</a:t>
             </a:r>
           </a:p>
           <a:p>
@@ -5066,7 +5066,7 @@
                 </a:solidFill>
                 <a:latin typeface="Consolas"/>
               </a:rPr>
-              <a:t>  Tier 1 capital ratio           computed  15.13%   reported  15.1%   PASS   headroom over 13.0%: 2.1 points</a:t>
+              <a:t>Tier 1 capital ratio           computed  15.13%   reported  15.1%   PASS   headroom over 13.0%: 2.1 points</a:t>
             </a:r>
           </a:p>
           <a:p>
@@ -5078,7 +5078,7 @@
                 </a:solidFill>
                 <a:latin typeface="Consolas"/>
               </a:rPr>
-              <a:t>  Total capital ratio            computed  17.01%   reported  17.0%   PASS   headroom over 15.0%: 2.0 points</a:t>
+              <a:t>Total capital ratio            computed  17.01%   reported  17.0%   PASS   headroom over 15.0%: 2.0 points</a:t>
             </a:r>
           </a:p>
           <a:p>
@@ -5090,7 +5090,7 @@
                 </a:solidFill>
                 <a:latin typeface="Consolas"/>
               </a:rPr>
-              <a:t>  Supplementary leverage ratio   computed   5.52%   reported   5.5%   PASS</a:t>
+              <a:t>Supplementary leverage ratio   computed   5.52%   reported   5.5%   PASS</a:t>
             </a:r>
           </a:p>
           <a:p>
@@ -5102,7 +5102,7 @@
                 </a:solidFill>
                 <a:latin typeface="Consolas"/>
               </a:rPr>
-              <a:t> </a:t>
+              <a:t/>
             </a:r>
           </a:p>
           <a:p>
@@ -5285,7 +5285,7 @@
                   <a:srgbClr val="5D6B7E"/>
                 </a:solidFill>
               </a:rPr>
-              <a:t>ISBMS · PGDM 2025–27 · AGENTIC AI &amp; ADVANCED ANALYTICS IN FINANCE</a:t>
+              <a:t>AI IN FINANCE · THE COMPLETE CRASH COURSE</a:t>
             </a:r>
           </a:p>
         </p:txBody>
@@ -5661,7 +5661,7 @@
                 </a:solidFill>
                 <a:latin typeface="Consolas"/>
               </a:rPr>
-              <a:t>  CET1 capital ratio             computed  15.04%   reported  14.2%   FAIL   headroom over 11.5%: 2.7 points</a:t>
+              <a:t>CET1 capital ratio             computed  15.04%   reported  14.2%   FAIL   headroom over 11.5%: 2.7 points</a:t>
             </a:r>
           </a:p>
           <a:p>
@@ -5673,7 +5673,7 @@
                 </a:solidFill>
                 <a:latin typeface="Consolas"/>
               </a:rPr>
-              <a:t>  Tier 1 capital ratio           computed  15.13%   reported  15.1%   PASS   headroom over 13.0%: 2.1 points</a:t>
+              <a:t>Tier 1 capital ratio           computed  15.13%   reported  15.1%   PASS   headroom over 13.0%: 2.1 points</a:t>
             </a:r>
           </a:p>
           <a:p>
@@ -5685,7 +5685,7 @@
                 </a:solidFill>
                 <a:latin typeface="Consolas"/>
               </a:rPr>
-              <a:t>  Total capital ratio            computed  17.01%   reported  17.0%   PASS   headroom over 15.0%: 2.0 points</a:t>
+              <a:t>Total capital ratio            computed  17.01%   reported  17.0%   PASS   headroom over 15.0%: 2.0 points</a:t>
             </a:r>
           </a:p>
           <a:p>
@@ -5697,7 +5697,7 @@
                 </a:solidFill>
                 <a:latin typeface="Consolas"/>
               </a:rPr>
-              <a:t>  Supplementary leverage ratio   computed   5.52%   reported   5.5%   PASS</a:t>
+              <a:t>Supplementary leverage ratio   computed   5.52%   reported   5.5%   PASS</a:t>
             </a:r>
           </a:p>
         </p:txBody>
@@ -5919,7 +5919,7 @@
                   <a:srgbClr val="C9A227"/>
                 </a:solidFill>
               </a:rPr>
-              <a:t>That is why reconciliation runs before the model writes anything:  </a:t>
+              <a:t>That is why reconciliation runs before the model writes anything:</a:t>
             </a:r>
             <a:r>
               <a:rPr sz="1200" b="0">
@@ -5961,7 +5961,7 @@
                   <a:srgbClr val="5D6B7E"/>
                 </a:solidFill>
               </a:rPr>
-              <a:t>ISBMS · PGDM 2025–27 · AGENTIC AI &amp; ADVANCED ANALYTICS IN FINANCE</a:t>
+              <a:t>AI IN FINANCE · THE COMPLETE CRASH COURSE</a:t>
             </a:r>
           </a:p>
         </p:txBody>
@@ -6303,7 +6303,7 @@
                 </a:solidFill>
                 <a:latin typeface="Consolas"/>
               </a:rPr>
-              <a:t>  1 heading, 1 source paragraph, 1 table with 10 rows, 1 narrative placeholder</a:t>
+              <a:t>1 heading, 1 source paragraph, 1 table with 10 rows, 1 narrative placeholder</a:t>
             </a:r>
           </a:p>
           <a:p>
@@ -6315,7 +6315,7 @@
                 </a:solidFill>
                 <a:latin typeface="Consolas"/>
               </a:rPr>
-              <a:t>  CET1 capital                                   $302,619 million   [deterministic]</a:t>
+              <a:t>CET1 capital                                   $302,619 million   [deterministic]</a:t>
             </a:r>
           </a:p>
           <a:p>
@@ -6327,7 +6327,7 @@
                 </a:solidFill>
                 <a:latin typeface="Consolas"/>
               </a:rPr>
-              <a:t>  Tier 1 capital                                 $322,720 million   [deterministic]</a:t>
+              <a:t>Tier 1 capital                                 $322,720 million   [deterministic]</a:t>
             </a:r>
           </a:p>
           <a:p>
@@ -6339,7 +6339,7 @@
                 </a:solidFill>
                 <a:latin typeface="Consolas"/>
               </a:rPr>
-              <a:t>  Total capital                                  $362,723 million   [deterministic]</a:t>
+              <a:t>Total capital                                  $362,723 million   [deterministic]</a:t>
             </a:r>
           </a:p>
           <a:p>
@@ -6351,7 +6351,7 @@
                 </a:solidFill>
                 <a:latin typeface="Consolas"/>
               </a:rPr>
-              <a:t>  Risk-weighted assets (Standardized)          $2,132,428 million   [deterministic]</a:t>
+              <a:t>Risk-weighted assets (Standardized)          $2,132,428 million   [deterministic]</a:t>
             </a:r>
           </a:p>
           <a:p>
@@ -6363,7 +6363,7 @@
                 </a:solidFill>
                 <a:latin typeface="Consolas"/>
               </a:rPr>
-              <a:t>  Total leverage exposure                      $5,844,422 million   [deterministic]</a:t>
+              <a:t>Total leverage exposure                      $5,844,422 million   [deterministic]</a:t>
             </a:r>
           </a:p>
           <a:p>
@@ -6375,7 +6375,7 @@
                 </a:solidFill>
                 <a:latin typeface="Consolas"/>
               </a:rPr>
-              <a:t>  CET1 capital ratio (computed)                            14.19%   [derived]</a:t>
+              <a:t>CET1 capital ratio (computed)                            14.19%   [derived]</a:t>
             </a:r>
           </a:p>
           <a:p>
@@ -6387,7 +6387,7 @@
                 </a:solidFill>
                 <a:latin typeface="Consolas"/>
               </a:rPr>
-              <a:t>  Tier 1 capital ratio (computed)                          15.13%   [derived]</a:t>
+              <a:t>Tier 1 capital ratio (computed)                          15.13%   [derived]</a:t>
             </a:r>
           </a:p>
           <a:p>
@@ -6399,7 +6399,7 @@
                 </a:solidFill>
                 <a:latin typeface="Consolas"/>
               </a:rPr>
-              <a:t>  Total capital ratio (computed)                           17.01%   [derived]</a:t>
+              <a:t>Total capital ratio (computed)                           17.01%   [derived]</a:t>
             </a:r>
           </a:p>
           <a:p>
@@ -6411,7 +6411,7 @@
                 </a:solidFill>
                 <a:latin typeface="Consolas"/>
               </a:rPr>
-              <a:t>  Supplementary leverage ratio (computed)                   5.52%   [derived]</a:t>
+              <a:t>Supplementary leverage ratio (computed)                   5.52%   [derived]</a:t>
             </a:r>
           </a:p>
           <a:p>
@@ -6423,7 +6423,7 @@
                 </a:solidFill>
                 <a:latin typeface="Consolas"/>
               </a:rPr>
-              <a:t>  CET1 headroom over 11.5% requirement                 2.7 points   [derived]</a:t>
+              <a:t>CET1 headroom over 11.5% requirement                 2.7 points   [derived]</a:t>
             </a:r>
           </a:p>
         </p:txBody>
@@ -6694,7 +6694,7 @@
                   <a:srgbClr val="5D6B7E"/>
                 </a:solidFill>
               </a:rPr>
-              <a:t>ISBMS · PGDM 2025–27 · AGENTIC AI &amp; ADVANCED ANALYTICS IN FINANCE</a:t>
+              <a:t>AI IN FINANCE · THE COMPLETE CRASH COURSE</a:t>
             </a:r>
           </a:p>
         </p:txBody>
@@ -7004,7 +7004,7 @@
                   <a:srgbClr val="C9A227"/>
                 </a:solidFill>
               </a:rPr>
-              <a:t>TIP  </a:t>
+              <a:t>TIP</a:t>
             </a:r>
             <a:r>
               <a:rPr sz="900" b="0">
@@ -7184,7 +7184,7 @@
                   <a:srgbClr val="C9A227"/>
                 </a:solidFill>
               </a:rPr>
-              <a:t>TIP  </a:t>
+              <a:t>TIP</a:t>
             </a:r>
             <a:r>
               <a:rPr sz="900" b="0">
@@ -7364,7 +7364,7 @@
                   <a:srgbClr val="C9A227"/>
                 </a:solidFill>
               </a:rPr>
-              <a:t>TIP  </a:t>
+              <a:t>TIP</a:t>
             </a:r>
             <a:r>
               <a:rPr sz="900" b="0">
@@ -7544,7 +7544,7 @@
                   <a:srgbClr val="C9A227"/>
                 </a:solidFill>
               </a:rPr>
-              <a:t>TIP  </a:t>
+              <a:t>TIP</a:t>
             </a:r>
             <a:r>
               <a:rPr sz="900" b="0">
@@ -7724,7 +7724,7 @@
                   <a:srgbClr val="C9A227"/>
                 </a:solidFill>
               </a:rPr>
-              <a:t>TIP  </a:t>
+              <a:t>TIP</a:t>
             </a:r>
             <a:r>
               <a:rPr sz="900" b="0">
@@ -7904,7 +7904,7 @@
                   <a:srgbClr val="C9A227"/>
                 </a:solidFill>
               </a:rPr>
-              <a:t>TIP  </a:t>
+              <a:t>TIP</a:t>
             </a:r>
             <a:r>
               <a:rPr sz="900" b="0">
@@ -8084,7 +8084,7 @@
                   <a:srgbClr val="C9A227"/>
                 </a:solidFill>
               </a:rPr>
-              <a:t>TIP  </a:t>
+              <a:t>TIP</a:t>
             </a:r>
             <a:r>
               <a:rPr sz="900" b="0">
@@ -8214,7 +8214,7 @@
                   <a:srgbClr val="C9A227"/>
                 </a:solidFill>
               </a:rPr>
-              <a:t>Before Session 7:  </a:t>
+              <a:t>Before Session 7:</a:t>
             </a:r>
             <a:r>
               <a:rPr sz="1100" b="0">
@@ -8620,7 +8620,7 @@
                   <a:srgbClr val="C9A227"/>
                 </a:solidFill>
               </a:rPr>
-              <a:t>▪  </a:t>
+              <a:t>▪</a:t>
             </a:r>
             <a:r>
               <a:rPr sz="1000" b="0">
@@ -8662,7 +8662,7 @@
                   <a:srgbClr val="C9A227"/>
                 </a:solidFill>
               </a:rPr>
-              <a:t>▪  </a:t>
+              <a:t>▪</a:t>
             </a:r>
             <a:r>
               <a:rPr sz="1000" b="0">
@@ -8704,7 +8704,7 @@
                   <a:srgbClr val="C9A227"/>
                 </a:solidFill>
               </a:rPr>
-              <a:t>▪  </a:t>
+              <a:t>▪</a:t>
             </a:r>
             <a:r>
               <a:rPr sz="1000" b="0">
@@ -8746,7 +8746,7 @@
                   <a:srgbClr val="C9A227"/>
                 </a:solidFill>
               </a:rPr>
-              <a:t>▪  </a:t>
+              <a:t>▪</a:t>
             </a:r>
             <a:r>
               <a:rPr sz="1000" b="0">
@@ -8945,7 +8945,7 @@
                   <a:srgbClr val="C9A227"/>
                 </a:solidFill>
               </a:rPr>
-              <a:t>▪  </a:t>
+              <a:t>▪</a:t>
             </a:r>
             <a:r>
               <a:rPr sz="1000" b="0">
@@ -8987,7 +8987,7 @@
                   <a:srgbClr val="C9A227"/>
                 </a:solidFill>
               </a:rPr>
-              <a:t>▪  </a:t>
+              <a:t>▪</a:t>
             </a:r>
             <a:r>
               <a:rPr sz="1000" b="0">
@@ -9029,7 +9029,7 @@
                   <a:srgbClr val="C9A227"/>
                 </a:solidFill>
               </a:rPr>
-              <a:t>▪  </a:t>
+              <a:t>▪</a:t>
             </a:r>
             <a:r>
               <a:rPr sz="1000" b="0">
@@ -9071,7 +9071,7 @@
                   <a:srgbClr val="C9A227"/>
                 </a:solidFill>
               </a:rPr>
-              <a:t>▪  </a:t>
+              <a:t>▪</a:t>
             </a:r>
             <a:r>
               <a:rPr sz="1000" b="0">
@@ -9270,7 +9270,7 @@
                   <a:srgbClr val="C9A227"/>
                 </a:solidFill>
               </a:rPr>
-              <a:t>▪  </a:t>
+              <a:t>▪</a:t>
             </a:r>
             <a:r>
               <a:rPr sz="1000" b="0">
@@ -9312,7 +9312,7 @@
                   <a:srgbClr val="C9A227"/>
                 </a:solidFill>
               </a:rPr>
-              <a:t>▪  </a:t>
+              <a:t>▪</a:t>
             </a:r>
             <a:r>
               <a:rPr sz="1000" b="0">
@@ -9354,7 +9354,7 @@
                   <a:srgbClr val="C9A227"/>
                 </a:solidFill>
               </a:rPr>
-              <a:t>▪  </a:t>
+              <a:t>▪</a:t>
             </a:r>
             <a:r>
               <a:rPr sz="1000" b="0">
@@ -9396,7 +9396,7 @@
                   <a:srgbClr val="C9A227"/>
                 </a:solidFill>
               </a:rPr>
-              <a:t>▪  </a:t>
+              <a:t>▪</a:t>
             </a:r>
             <a:r>
               <a:rPr sz="1000" b="0">
@@ -9526,7 +9526,7 @@
                   <a:srgbClr val="3A5C9E"/>
                 </a:solidFill>
               </a:rPr>
-              <a:t>NOTHING IN HOUR 3 NEEDS AN API KEY.  </a:t>
+              <a:t>NOTHING IN HOUR 3 NEEDS AN API KEY.</a:t>
             </a:r>
             <a:r>
               <a:rPr sz="1100" b="0">
@@ -9656,7 +9656,7 @@
                   <a:srgbClr val="C9A227"/>
                 </a:solidFill>
               </a:rPr>
-              <a:t>The whole module in one line:  </a:t>
+              <a:t>The whole module in one line:</a:t>
             </a:r>
             <a:r>
               <a:rPr sz="1200" b="0">
@@ -9698,7 +9698,7 @@
                   <a:srgbClr val="5D6B7E"/>
                 </a:solidFill>
               </a:rPr>
-              <a:t>ISBMS · PGDM 2025–27 · AGENTIC AI &amp; ADVANCED ANALYTICS IN FINANCE</a:t>
+              <a:t>AI IN FINANCE · THE COMPLETE CRASH COURSE</a:t>
             </a:r>
           </a:p>
         </p:txBody>
@@ -10018,7 +10018,7 @@
                   <a:srgbClr val="C9A227"/>
                 </a:solidFill>
               </a:rPr>
-              <a:t>▪  </a:t>
+              <a:t>▪</a:t>
             </a:r>
             <a:r>
               <a:rPr sz="1000" b="0">
@@ -10060,7 +10060,7 @@
                   <a:srgbClr val="C9A227"/>
                 </a:solidFill>
               </a:rPr>
-              <a:t>▪  </a:t>
+              <a:t>▪</a:t>
             </a:r>
             <a:r>
               <a:rPr sz="1000" b="0">
@@ -10102,7 +10102,7 @@
                   <a:srgbClr val="C9A227"/>
                 </a:solidFill>
               </a:rPr>
-              <a:t>▪  </a:t>
+              <a:t>▪</a:t>
             </a:r>
             <a:r>
               <a:rPr sz="1000" b="0">
@@ -10301,7 +10301,7 @@
                   <a:srgbClr val="C9A227"/>
                 </a:solidFill>
               </a:rPr>
-              <a:t>▪  </a:t>
+              <a:t>▪</a:t>
             </a:r>
             <a:r>
               <a:rPr sz="1000" b="0">
@@ -10343,7 +10343,7 @@
                   <a:srgbClr val="C9A227"/>
                 </a:solidFill>
               </a:rPr>
-              <a:t>▪  </a:t>
+              <a:t>▪</a:t>
             </a:r>
             <a:r>
               <a:rPr sz="1000" b="0">
@@ -10385,7 +10385,7 @@
                   <a:srgbClr val="C9A227"/>
                 </a:solidFill>
               </a:rPr>
-              <a:t>▪  </a:t>
+              <a:t>▪</a:t>
             </a:r>
             <a:r>
               <a:rPr sz="1000" b="0">
@@ -10584,7 +10584,7 @@
                   <a:srgbClr val="C9A227"/>
                 </a:solidFill>
               </a:rPr>
-              <a:t>▪  </a:t>
+              <a:t>▪</a:t>
             </a:r>
             <a:r>
               <a:rPr sz="1000" b="0">
@@ -10626,7 +10626,7 @@
                   <a:srgbClr val="C9A227"/>
                 </a:solidFill>
               </a:rPr>
-              <a:t>▪  </a:t>
+              <a:t>▪</a:t>
             </a:r>
             <a:r>
               <a:rPr sz="1000" b="0">
@@ -10668,7 +10668,7 @@
                   <a:srgbClr val="C9A227"/>
                 </a:solidFill>
               </a:rPr>
-              <a:t>▪  </a:t>
+              <a:t>▪</a:t>
             </a:r>
             <a:r>
               <a:rPr sz="1000" b="0">
@@ -10935,7 +10935,7 @@
                   <a:srgbClr val="C9A227"/>
                 </a:solidFill>
               </a:rPr>
-              <a:t>A Pillar 3 report is not a new set of numbers:  </a:t>
+              <a:t>A Pillar 3 report is not a new set of numbers:</a:t>
             </a:r>
             <a:r>
               <a:rPr sz="1200" b="0">
@@ -10977,7 +10977,7 @@
                   <a:srgbClr val="5D6B7E"/>
                 </a:solidFill>
               </a:rPr>
-              <a:t>ISBMS · PGDM 2025–27 · AGENTIC AI &amp; ADVANCED ANALYTICS IN FINANCE</a:t>
+              <a:t>AI IN FINANCE · THE COMPLETE CRASH COURSE</a:t>
             </a:r>
           </a:p>
         </p:txBody>
@@ -12878,7 +12878,7 @@
                   <a:srgbClr val="C9A227"/>
                 </a:solidFill>
               </a:rPr>
-              <a:t>The tiers are not interchangeable:  </a:t>
+              <a:t>The tiers are not interchangeable:</a:t>
             </a:r>
             <a:r>
               <a:rPr sz="1200" b="0">
@@ -12920,7 +12920,7 @@
                   <a:srgbClr val="5D6B7E"/>
                 </a:solidFill>
               </a:rPr>
-              <a:t>ISBMS · PGDM 2025–27 · AGENTIC AI &amp; ADVANCED ANALYTICS IN FINANCE</a:t>
+              <a:t>AI IN FINANCE · THE COMPLETE CRASH COURSE</a:t>
             </a:r>
           </a:p>
         </p:txBody>
@@ -14034,7 +14034,7 @@
                   <a:srgbClr val="C9A227"/>
                 </a:solidFill>
               </a:rPr>
-              <a:t>In March 2026 the agencies proposed replacing this dual calculation:  </a:t>
+              <a:t>In March 2026 the agencies proposed replacing this dual calculation:</a:t>
             </a:r>
             <a:r>
               <a:rPr sz="1200" b="0">
@@ -14076,7 +14076,7 @@
                   <a:srgbClr val="5D6B7E"/>
                 </a:solidFill>
               </a:rPr>
-              <a:t>ISBMS · PGDM 2025–27 · AGENTIC AI &amp; ADVANCED ANALYTICS IN FINANCE</a:t>
+              <a:t>AI IN FINANCE · THE COMPLETE CRASH COURSE</a:t>
             </a:r>
           </a:p>
         </p:txBody>
@@ -15307,7 +15307,7 @@
                   <a:srgbClr val="C9A227"/>
                 </a:solidFill>
               </a:rPr>
-              <a:t>▪  </a:t>
+              <a:t>▪</a:t>
             </a:r>
             <a:r>
               <a:rPr sz="950" b="0">
@@ -15349,7 +15349,7 @@
                   <a:srgbClr val="C9A227"/>
                 </a:solidFill>
               </a:rPr>
-              <a:t>▪  </a:t>
+              <a:t>▪</a:t>
             </a:r>
             <a:r>
               <a:rPr sz="950" b="0">
@@ -15391,7 +15391,7 @@
                   <a:srgbClr val="C9A227"/>
                 </a:solidFill>
               </a:rPr>
-              <a:t>▪  </a:t>
+              <a:t>▪</a:t>
             </a:r>
             <a:r>
               <a:rPr sz="950" b="0">
@@ -15590,7 +15590,7 @@
                   <a:srgbClr val="C9A227"/>
                 </a:solidFill>
               </a:rPr>
-              <a:t>▪  </a:t>
+              <a:t>▪</a:t>
             </a:r>
             <a:r>
               <a:rPr sz="950" b="0">
@@ -15632,7 +15632,7 @@
                   <a:srgbClr val="C9A227"/>
                 </a:solidFill>
               </a:rPr>
-              <a:t>▪  </a:t>
+              <a:t>▪</a:t>
             </a:r>
             <a:r>
               <a:rPr sz="950" b="0">
@@ -15674,7 +15674,7 @@
                   <a:srgbClr val="C9A227"/>
                 </a:solidFill>
               </a:rPr>
-              <a:t>▪  </a:t>
+              <a:t>▪</a:t>
             </a:r>
             <a:r>
               <a:rPr sz="950" b="0">
@@ -15873,7 +15873,7 @@
                   <a:srgbClr val="C9A227"/>
                 </a:solidFill>
               </a:rPr>
-              <a:t>▪  </a:t>
+              <a:t>▪</a:t>
             </a:r>
             <a:r>
               <a:rPr sz="950" b="0">
@@ -15915,7 +15915,7 @@
                   <a:srgbClr val="C9A227"/>
                 </a:solidFill>
               </a:rPr>
-              <a:t>▪  </a:t>
+              <a:t>▪</a:t>
             </a:r>
             <a:r>
               <a:rPr sz="950" b="0">
@@ -15957,7 +15957,7 @@
                   <a:srgbClr val="C9A227"/>
                 </a:solidFill>
               </a:rPr>
-              <a:t>▪  </a:t>
+              <a:t>▪</a:t>
             </a:r>
             <a:r>
               <a:rPr sz="950" b="0">
@@ -16087,7 +16087,7 @@
                   <a:srgbClr val="C9A227"/>
                 </a:solidFill>
               </a:rPr>
-              <a:t>Keep every threshold in a configuration file, never in the code:  </a:t>
+              <a:t>Keep every threshold in a configuration file, never in the code:</a:t>
             </a:r>
             <a:r>
               <a:rPr sz="1200" b="0">
@@ -16641,7 +16641,7 @@
                   <a:srgbClr val="5D6B7E"/>
                 </a:solidFill>
               </a:rPr>
-              <a:t>ISBMS · PGDM 2025–27 · AGENTIC AI &amp; ADVANCED ANALYTICS IN FINANCE</a:t>
+              <a:t>AI IN FINANCE · THE COMPLETE CRASH COURSE</a:t>
             </a:r>
           </a:p>
         </p:txBody>
@@ -17735,7 +17735,7 @@
                 </a:solidFill>
                 <a:latin typeface="Georgia"/>
               </a:rPr>
-              <a:t>ONE SENTENCE HOLDS THE SCHEME TOGETHER:  </a:t>
+              <a:t>ONE SENTENCE HOLDS THE SCHEME TOGETHER:</a:t>
             </a:r>
             <a:r>
               <a:rPr sz="1500" b="1">
@@ -17915,7 +17915,7 @@
                   <a:srgbClr val="5D6B7E"/>
                 </a:solidFill>
               </a:rPr>
-              <a:t>ISBMS · PGDM 2025–27 · AGENTIC AI &amp; ADVANCED ANALYTICS IN FINANCE</a:t>
+              <a:t>AI IN FINANCE · THE COMPLETE CRASH COURSE</a:t>
             </a:r>
           </a:p>
         </p:txBody>
@@ -19136,7 +19136,7 @@
                   <a:srgbClr val="5D6B7E"/>
                 </a:solidFill>
               </a:rPr>
-              <a:t>ISBMS · PGDM 2025–27 · AGENTIC AI &amp; ADVANCED ANALYTICS IN FINANCE</a:t>
+              <a:t>AI IN FINANCE · THE COMPLETE CRASH COURSE</a:t>
             </a:r>
           </a:p>
         </p:txBody>
